--- a/slides/15-modeling.pptx
+++ b/slides/15-modeling.pptx
@@ -220,7 +220,7 @@
           <a:p>
             <a:fld id="{2CD22518-F7FE-2E40-9C60-793856882CE6}" type="datetimeFigureOut">
               <a:rPr lang="en-US" smtClean="0"/>
-              <a:t>2/25/26</a:t>
+              <a:t>2/26/26</a:t>
             </a:fld>
             <a:endParaRPr lang="en-US"/>
           </a:p>
@@ -4677,7 +4677,7 @@
             <a:fld id="{B61BEF0D-F0BB-DE4B-95CE-6DB70DBA9567}" type="datetimeFigureOut">
               <a:rPr lang="en-US" smtClean="0"/>
               <a:pPr/>
-              <a:t>2/25/26</a:t>
+              <a:t>2/26/26</a:t>
             </a:fld>
             <a:endParaRPr lang="en-US" dirty="0"/>
           </a:p>
@@ -4941,7 +4941,7 @@
             <a:fld id="{B61BEF0D-F0BB-DE4B-95CE-6DB70DBA9567}" type="datetimeFigureOut">
               <a:rPr lang="en-US" smtClean="0"/>
               <a:pPr/>
-              <a:t>2/25/26</a:t>
+              <a:t>2/26/26</a:t>
             </a:fld>
             <a:endParaRPr lang="en-US" dirty="0"/>
           </a:p>
@@ -5178,7 +5178,7 @@
             <a:fld id="{B61BEF0D-F0BB-DE4B-95CE-6DB70DBA9567}" type="datetimeFigureOut">
               <a:rPr lang="en-US" smtClean="0"/>
               <a:pPr/>
-              <a:t>2/25/26</a:t>
+              <a:t>2/26/26</a:t>
             </a:fld>
             <a:endParaRPr lang="en-US" dirty="0"/>
           </a:p>
@@ -5427,7 +5427,7 @@
             <a:fld id="{B61BEF0D-F0BB-DE4B-95CE-6DB70DBA9567}" type="datetimeFigureOut">
               <a:rPr lang="en-US" smtClean="0"/>
               <a:pPr/>
-              <a:t>2/25/26</a:t>
+              <a:t>2/26/26</a:t>
             </a:fld>
             <a:endParaRPr lang="en-US" dirty="0"/>
           </a:p>
@@ -5736,7 +5736,7 @@
             <a:fld id="{B61BEF0D-F0BB-DE4B-95CE-6DB70DBA9567}" type="datetimeFigureOut">
               <a:rPr lang="en-US" smtClean="0"/>
               <a:pPr/>
-              <a:t>2/25/26</a:t>
+              <a:t>2/26/26</a:t>
             </a:fld>
             <a:endParaRPr lang="en-US" dirty="0"/>
           </a:p>
@@ -6047,7 +6047,7 @@
             <a:fld id="{B61BEF0D-F0BB-DE4B-95CE-6DB70DBA9567}" type="datetimeFigureOut">
               <a:rPr lang="en-US" smtClean="0"/>
               <a:pPr/>
-              <a:t>2/25/26</a:t>
+              <a:t>2/26/26</a:t>
             </a:fld>
             <a:endParaRPr lang="en-US" dirty="0"/>
           </a:p>
@@ -6471,7 +6471,7 @@
             <a:fld id="{B61BEF0D-F0BB-DE4B-95CE-6DB70DBA9567}" type="datetimeFigureOut">
               <a:rPr lang="en-US" smtClean="0"/>
               <a:pPr/>
-              <a:t>2/25/26</a:t>
+              <a:t>2/26/26</a:t>
             </a:fld>
             <a:endParaRPr lang="en-US" dirty="0"/>
           </a:p>
@@ -6568,7 +6568,7 @@
             <a:fld id="{B61BEF0D-F0BB-DE4B-95CE-6DB70DBA9567}" type="datetimeFigureOut">
               <a:rPr lang="en-US" smtClean="0"/>
               <a:pPr/>
-              <a:t>2/25/26</a:t>
+              <a:t>2/26/26</a:t>
             </a:fld>
             <a:endParaRPr lang="en-US" dirty="0"/>
           </a:p>
@@ -6732,7 +6732,7 @@
             <a:fld id="{B61BEF0D-F0BB-DE4B-95CE-6DB70DBA9567}" type="datetimeFigureOut">
               <a:rPr lang="en-US" smtClean="0"/>
               <a:pPr/>
-              <a:t>2/25/26</a:t>
+              <a:t>2/26/26</a:t>
             </a:fld>
             <a:endParaRPr lang="en-US" dirty="0"/>
           </a:p>
@@ -7112,7 +7112,7 @@
             <a:fld id="{B61BEF0D-F0BB-DE4B-95CE-6DB70DBA9567}" type="datetimeFigureOut">
               <a:rPr lang="en-US" smtClean="0"/>
               <a:pPr/>
-              <a:t>2/25/26</a:t>
+              <a:t>2/26/26</a:t>
             </a:fld>
             <a:endParaRPr lang="en-US" dirty="0"/>
           </a:p>
@@ -7403,7 +7403,7 @@
             <a:fld id="{B61BEF0D-F0BB-DE4B-95CE-6DB70DBA9567}" type="datetimeFigureOut">
               <a:rPr lang="en-US" smtClean="0"/>
               <a:pPr/>
-              <a:t>2/25/26</a:t>
+              <a:t>2/26/26</a:t>
             </a:fld>
             <a:endParaRPr lang="en-US" dirty="0"/>
           </a:p>
@@ -7616,7 +7616,7 @@
             <a:fld id="{B61BEF0D-F0BB-DE4B-95CE-6DB70DBA9567}" type="datetimeFigureOut">
               <a:rPr lang="en-US" smtClean="0"/>
               <a:pPr/>
-              <a:t>2/25/26</a:t>
+              <a:t>2/26/26</a:t>
             </a:fld>
             <a:endParaRPr lang="en-US" dirty="0"/>
           </a:p>
@@ -8634,8 +8634,8 @@
           </a:p>
         </p:txBody>
       </p:sp>
-      <mc:AlternateContent xmlns:mc="http://schemas.openxmlformats.org/markup-compatibility/2006">
-        <mc:Choice xmlns:a14="http://schemas.microsoft.com/office/drawing/2010/main" Requires="a14">
+      <mc:AlternateContent xmlns:mc="http://schemas.openxmlformats.org/markup-compatibility/2006" xmlns:a14="http://schemas.microsoft.com/office/drawing/2010/main">
+        <mc:Choice Requires="a14">
           <p:sp>
             <p:nvSpPr>
               <p:cNvPr id="6" name="Content Placeholder 2">
@@ -9079,7 +9079,7 @@
             </p:txBody>
           </p:sp>
         </mc:Choice>
-        <mc:Fallback>
+        <mc:Fallback xmlns="">
           <p:sp>
             <p:nvSpPr>
               <p:cNvPr id="6" name="Content Placeholder 2">
@@ -9740,8 +9740,8 @@
           </a:p>
         </p:txBody>
       </p:sp>
-      <mc:AlternateContent xmlns:mc="http://schemas.openxmlformats.org/markup-compatibility/2006">
-        <mc:Choice xmlns:a14="http://schemas.microsoft.com/office/drawing/2010/main" Requires="a14">
+      <mc:AlternateContent xmlns:mc="http://schemas.openxmlformats.org/markup-compatibility/2006" xmlns:a14="http://schemas.microsoft.com/office/drawing/2010/main">
+        <mc:Choice Requires="a14">
           <p:sp>
             <p:nvSpPr>
               <p:cNvPr id="6" name="Content Placeholder 2">
@@ -10463,7 +10463,7 @@
             </p:txBody>
           </p:sp>
         </mc:Choice>
-        <mc:Fallback>
+        <mc:Fallback xmlns="">
           <p:sp>
             <p:nvSpPr>
               <p:cNvPr id="6" name="Content Placeholder 2">
@@ -15682,8 +15682,25 @@
           <a:p>
             <a:r>
               <a:rPr lang="en-US" sz="2200" dirty="0"/>
-              <a:t>Choose one of the systems we looked at today</a:t>
-            </a:r>
+              <a:t>Choose a system from this visual survey of VA+ML systems: </a:t>
+            </a:r>
+            <a:r>
+              <a:rPr lang="en-US" sz="2200" dirty="0">
+                <a:hlinkClick r:id="rId3"/>
+              </a:rPr>
+              <a:t>https://trustmlvis.lnu.se</a:t>
+            </a:r>
+            <a:r>
+              <a:rPr lang="en-US" sz="2200">
+                <a:hlinkClick r:id="rId3"/>
+              </a:rPr>
+              <a:t>/</a:t>
+            </a:r>
+            <a:r>
+              <a:rPr lang="en-US" sz="2200"/>
+              <a:t> </a:t>
+            </a:r>
+            <a:endParaRPr lang="en-US" sz="2200" dirty="0"/>
           </a:p>
           <a:p>
             <a:r>

--- a/slides/15-modeling.pptx
+++ b/slides/15-modeling.pptx
@@ -220,7 +220,7 @@
           <a:p>
             <a:fld id="{2CD22518-F7FE-2E40-9C60-793856882CE6}" type="datetimeFigureOut">
               <a:rPr lang="en-US" smtClean="0"/>
-              <a:t>2/26/26</a:t>
+              <a:t>3/24/26</a:t>
             </a:fld>
             <a:endParaRPr lang="en-US"/>
           </a:p>
@@ -4677,7 +4677,7 @@
             <a:fld id="{B61BEF0D-F0BB-DE4B-95CE-6DB70DBA9567}" type="datetimeFigureOut">
               <a:rPr lang="en-US" smtClean="0"/>
               <a:pPr/>
-              <a:t>2/26/26</a:t>
+              <a:t>3/24/26</a:t>
             </a:fld>
             <a:endParaRPr lang="en-US" dirty="0"/>
           </a:p>
@@ -4941,7 +4941,7 @@
             <a:fld id="{B61BEF0D-F0BB-DE4B-95CE-6DB70DBA9567}" type="datetimeFigureOut">
               <a:rPr lang="en-US" smtClean="0"/>
               <a:pPr/>
-              <a:t>2/26/26</a:t>
+              <a:t>3/24/26</a:t>
             </a:fld>
             <a:endParaRPr lang="en-US" dirty="0"/>
           </a:p>
@@ -5178,7 +5178,7 @@
             <a:fld id="{B61BEF0D-F0BB-DE4B-95CE-6DB70DBA9567}" type="datetimeFigureOut">
               <a:rPr lang="en-US" smtClean="0"/>
               <a:pPr/>
-              <a:t>2/26/26</a:t>
+              <a:t>3/24/26</a:t>
             </a:fld>
             <a:endParaRPr lang="en-US" dirty="0"/>
           </a:p>
@@ -5427,7 +5427,7 @@
             <a:fld id="{B61BEF0D-F0BB-DE4B-95CE-6DB70DBA9567}" type="datetimeFigureOut">
               <a:rPr lang="en-US" smtClean="0"/>
               <a:pPr/>
-              <a:t>2/26/26</a:t>
+              <a:t>3/24/26</a:t>
             </a:fld>
             <a:endParaRPr lang="en-US" dirty="0"/>
           </a:p>
@@ -5736,7 +5736,7 @@
             <a:fld id="{B61BEF0D-F0BB-DE4B-95CE-6DB70DBA9567}" type="datetimeFigureOut">
               <a:rPr lang="en-US" smtClean="0"/>
               <a:pPr/>
-              <a:t>2/26/26</a:t>
+              <a:t>3/24/26</a:t>
             </a:fld>
             <a:endParaRPr lang="en-US" dirty="0"/>
           </a:p>
@@ -6047,7 +6047,7 @@
             <a:fld id="{B61BEF0D-F0BB-DE4B-95CE-6DB70DBA9567}" type="datetimeFigureOut">
               <a:rPr lang="en-US" smtClean="0"/>
               <a:pPr/>
-              <a:t>2/26/26</a:t>
+              <a:t>3/24/26</a:t>
             </a:fld>
             <a:endParaRPr lang="en-US" dirty="0"/>
           </a:p>
@@ -6471,7 +6471,7 @@
             <a:fld id="{B61BEF0D-F0BB-DE4B-95CE-6DB70DBA9567}" type="datetimeFigureOut">
               <a:rPr lang="en-US" smtClean="0"/>
               <a:pPr/>
-              <a:t>2/26/26</a:t>
+              <a:t>3/24/26</a:t>
             </a:fld>
             <a:endParaRPr lang="en-US" dirty="0"/>
           </a:p>
@@ -6568,7 +6568,7 @@
             <a:fld id="{B61BEF0D-F0BB-DE4B-95CE-6DB70DBA9567}" type="datetimeFigureOut">
               <a:rPr lang="en-US" smtClean="0"/>
               <a:pPr/>
-              <a:t>2/26/26</a:t>
+              <a:t>3/24/26</a:t>
             </a:fld>
             <a:endParaRPr lang="en-US" dirty="0"/>
           </a:p>
@@ -6732,7 +6732,7 @@
             <a:fld id="{B61BEF0D-F0BB-DE4B-95CE-6DB70DBA9567}" type="datetimeFigureOut">
               <a:rPr lang="en-US" smtClean="0"/>
               <a:pPr/>
-              <a:t>2/26/26</a:t>
+              <a:t>3/24/26</a:t>
             </a:fld>
             <a:endParaRPr lang="en-US" dirty="0"/>
           </a:p>
@@ -7112,7 +7112,7 @@
             <a:fld id="{B61BEF0D-F0BB-DE4B-95CE-6DB70DBA9567}" type="datetimeFigureOut">
               <a:rPr lang="en-US" smtClean="0"/>
               <a:pPr/>
-              <a:t>2/26/26</a:t>
+              <a:t>3/24/26</a:t>
             </a:fld>
             <a:endParaRPr lang="en-US" dirty="0"/>
           </a:p>
@@ -7403,7 +7403,7 @@
             <a:fld id="{B61BEF0D-F0BB-DE4B-95CE-6DB70DBA9567}" type="datetimeFigureOut">
               <a:rPr lang="en-US" smtClean="0"/>
               <a:pPr/>
-              <a:t>2/26/26</a:t>
+              <a:t>3/24/26</a:t>
             </a:fld>
             <a:endParaRPr lang="en-US" dirty="0"/>
           </a:p>
@@ -7616,7 +7616,7 @@
             <a:fld id="{B61BEF0D-F0BB-DE4B-95CE-6DB70DBA9567}" type="datetimeFigureOut">
               <a:rPr lang="en-US" smtClean="0"/>
               <a:pPr/>
-              <a:t>2/26/26</a:t>
+              <a:t>3/24/26</a:t>
             </a:fld>
             <a:endParaRPr lang="en-US" dirty="0"/>
           </a:p>
@@ -10982,6 +10982,55 @@
           </a:p>
         </p:txBody>
       </p:sp>
+      <p:sp>
+        <p:nvSpPr>
+          <p:cNvPr id="5" name="Rounded Rectangle 4">
+            <a:extLst>
+              <a:ext uri="{FF2B5EF4-FFF2-40B4-BE49-F238E27FC236}">
+                <a16:creationId xmlns:a16="http://schemas.microsoft.com/office/drawing/2014/main" id="{51D092F5-4FC5-A8BB-CD9F-8F3F9B7CCD18}"/>
+              </a:ext>
+            </a:extLst>
+          </p:cNvPr>
+          <p:cNvSpPr/>
+          <p:nvPr/>
+        </p:nvSpPr>
+        <p:spPr>
+          <a:xfrm>
+            <a:off x="2984190" y="3512480"/>
+            <a:ext cx="5903478" cy="1319134"/>
+          </a:xfrm>
+          <a:prstGeom prst="roundRect">
+            <a:avLst/>
+          </a:prstGeom>
+        </p:spPr>
+        <p:style>
+          <a:lnRef idx="2">
+            <a:schemeClr val="accent1">
+              <a:shade val="15000"/>
+            </a:schemeClr>
+          </a:lnRef>
+          <a:fillRef idx="1">
+            <a:schemeClr val="accent1"/>
+          </a:fillRef>
+          <a:effectRef idx="0">
+            <a:schemeClr val="accent1"/>
+          </a:effectRef>
+          <a:fontRef idx="minor">
+            <a:schemeClr val="lt1"/>
+          </a:fontRef>
+        </p:style>
+        <p:txBody>
+          <a:bodyPr rtlCol="0" anchor="ctr"/>
+          <a:lstStyle/>
+          <a:p>
+            <a:pPr algn="ctr"/>
+            <a:r>
+              <a:rPr lang="en-US" sz="2400" dirty="0"/>
+              <a:t>How might you explain a model’s decision to someone without analytic expertise?</a:t>
+            </a:r>
+          </a:p>
+        </p:txBody>
+      </p:sp>
     </p:spTree>
     <p:extLst>
       <p:ext uri="{BB962C8B-B14F-4D97-AF65-F5344CB8AC3E}">
@@ -10992,6 +11041,254 @@
   <p:clrMapOvr>
     <a:masterClrMapping/>
   </p:clrMapOvr>
+  <p:timing>
+    <p:tnLst>
+      <p:par>
+        <p:cTn id="1" dur="indefinite" restart="never" nodeType="tmRoot">
+          <p:childTnLst>
+            <p:seq concurrent="1" nextAc="seek">
+              <p:cTn id="2" dur="indefinite" nodeType="mainSeq">
+                <p:childTnLst>
+                  <p:par>
+                    <p:cTn id="3" fill="hold">
+                      <p:stCondLst>
+                        <p:cond delay="indefinite"/>
+                      </p:stCondLst>
+                      <p:childTnLst>
+                        <p:par>
+                          <p:cTn id="4" fill="hold">
+                            <p:stCondLst>
+                              <p:cond delay="0"/>
+                            </p:stCondLst>
+                            <p:childTnLst>
+                              <p:par>
+                                <p:cTn id="5" presetID="1" presetClass="entr" presetSubtype="0" fill="hold" grpId="1" nodeType="clickEffect">
+                                  <p:stCondLst>
+                                    <p:cond delay="0"/>
+                                  </p:stCondLst>
+                                  <p:childTnLst>
+                                    <p:set>
+                                      <p:cBhvr>
+                                        <p:cTn id="6" dur="1" fill="hold">
+                                          <p:stCondLst>
+                                            <p:cond delay="0"/>
+                                          </p:stCondLst>
+                                        </p:cTn>
+                                        <p:tgtEl>
+                                          <p:spTgt spid="5"/>
+                                        </p:tgtEl>
+                                        <p:attrNameLst>
+                                          <p:attrName>style.visibility</p:attrName>
+                                        </p:attrNameLst>
+                                      </p:cBhvr>
+                                      <p:to>
+                                        <p:strVal val="visible"/>
+                                      </p:to>
+                                    </p:set>
+                                  </p:childTnLst>
+                                </p:cTn>
+                              </p:par>
+                            </p:childTnLst>
+                          </p:cTn>
+                        </p:par>
+                      </p:childTnLst>
+                    </p:cTn>
+                  </p:par>
+                  <p:par>
+                    <p:cTn id="7" fill="hold">
+                      <p:stCondLst>
+                        <p:cond delay="indefinite"/>
+                      </p:stCondLst>
+                      <p:childTnLst>
+                        <p:par>
+                          <p:cTn id="8" fill="hold">
+                            <p:stCondLst>
+                              <p:cond delay="0"/>
+                            </p:stCondLst>
+                            <p:childTnLst>
+                              <p:par>
+                                <p:cTn id="9" presetID="1" presetClass="exit" presetSubtype="0" fill="hold" grpId="0" nodeType="clickEffect">
+                                  <p:stCondLst>
+                                    <p:cond delay="0"/>
+                                  </p:stCondLst>
+                                  <p:childTnLst>
+                                    <p:set>
+                                      <p:cBhvr>
+                                        <p:cTn id="10" dur="1" fill="hold">
+                                          <p:stCondLst>
+                                            <p:cond delay="0"/>
+                                          </p:stCondLst>
+                                        </p:cTn>
+                                        <p:tgtEl>
+                                          <p:spTgt spid="5"/>
+                                        </p:tgtEl>
+                                        <p:attrNameLst>
+                                          <p:attrName>style.visibility</p:attrName>
+                                        </p:attrNameLst>
+                                      </p:cBhvr>
+                                      <p:to>
+                                        <p:strVal val="hidden"/>
+                                      </p:to>
+                                    </p:set>
+                                  </p:childTnLst>
+                                </p:cTn>
+                              </p:par>
+                              <p:par>
+                                <p:cTn id="11" presetID="1" presetClass="entr" presetSubtype="0" fill="hold" nodeType="withEffect">
+                                  <p:stCondLst>
+                                    <p:cond delay="0"/>
+                                  </p:stCondLst>
+                                  <p:childTnLst>
+                                    <p:set>
+                                      <p:cBhvr>
+                                        <p:cTn id="12" dur="1" fill="hold">
+                                          <p:stCondLst>
+                                            <p:cond delay="0"/>
+                                          </p:stCondLst>
+                                        </p:cTn>
+                                        <p:tgtEl>
+                                          <p:spTgt spid="7">
+                                            <p:txEl>
+                                              <p:pRg st="1" end="1"/>
+                                            </p:txEl>
+                                          </p:spTgt>
+                                        </p:tgtEl>
+                                        <p:attrNameLst>
+                                          <p:attrName>style.visibility</p:attrName>
+                                        </p:attrNameLst>
+                                      </p:cBhvr>
+                                      <p:to>
+                                        <p:strVal val="visible"/>
+                                      </p:to>
+                                    </p:set>
+                                  </p:childTnLst>
+                                </p:cTn>
+                              </p:par>
+                              <p:par>
+                                <p:cTn id="13" presetID="1" presetClass="entr" presetSubtype="0" fill="hold" nodeType="withEffect">
+                                  <p:stCondLst>
+                                    <p:cond delay="0"/>
+                                  </p:stCondLst>
+                                  <p:childTnLst>
+                                    <p:set>
+                                      <p:cBhvr>
+                                        <p:cTn id="14" dur="1" fill="hold">
+                                          <p:stCondLst>
+                                            <p:cond delay="0"/>
+                                          </p:stCondLst>
+                                        </p:cTn>
+                                        <p:tgtEl>
+                                          <p:spTgt spid="7">
+                                            <p:txEl>
+                                              <p:pRg st="2" end="2"/>
+                                            </p:txEl>
+                                          </p:spTgt>
+                                        </p:tgtEl>
+                                        <p:attrNameLst>
+                                          <p:attrName>style.visibility</p:attrName>
+                                        </p:attrNameLst>
+                                      </p:cBhvr>
+                                      <p:to>
+                                        <p:strVal val="visible"/>
+                                      </p:to>
+                                    </p:set>
+                                  </p:childTnLst>
+                                </p:cTn>
+                              </p:par>
+                              <p:par>
+                                <p:cTn id="15" presetID="1" presetClass="entr" presetSubtype="0" fill="hold" nodeType="withEffect">
+                                  <p:stCondLst>
+                                    <p:cond delay="0"/>
+                                  </p:stCondLst>
+                                  <p:childTnLst>
+                                    <p:set>
+                                      <p:cBhvr>
+                                        <p:cTn id="16" dur="1" fill="hold">
+                                          <p:stCondLst>
+                                            <p:cond delay="0"/>
+                                          </p:stCondLst>
+                                        </p:cTn>
+                                        <p:tgtEl>
+                                          <p:spTgt spid="7">
+                                            <p:txEl>
+                                              <p:pRg st="3" end="3"/>
+                                            </p:txEl>
+                                          </p:spTgt>
+                                        </p:tgtEl>
+                                        <p:attrNameLst>
+                                          <p:attrName>style.visibility</p:attrName>
+                                        </p:attrNameLst>
+                                      </p:cBhvr>
+                                      <p:to>
+                                        <p:strVal val="visible"/>
+                                      </p:to>
+                                    </p:set>
+                                  </p:childTnLst>
+                                </p:cTn>
+                              </p:par>
+                              <p:par>
+                                <p:cTn id="17" presetID="1" presetClass="entr" presetSubtype="0" fill="hold" nodeType="withEffect">
+                                  <p:stCondLst>
+                                    <p:cond delay="0"/>
+                                  </p:stCondLst>
+                                  <p:childTnLst>
+                                    <p:set>
+                                      <p:cBhvr>
+                                        <p:cTn id="18" dur="1" fill="hold">
+                                          <p:stCondLst>
+                                            <p:cond delay="0"/>
+                                          </p:stCondLst>
+                                        </p:cTn>
+                                        <p:tgtEl>
+                                          <p:spTgt spid="7">
+                                            <p:txEl>
+                                              <p:pRg st="4" end="4"/>
+                                            </p:txEl>
+                                          </p:spTgt>
+                                        </p:tgtEl>
+                                        <p:attrNameLst>
+                                          <p:attrName>style.visibility</p:attrName>
+                                        </p:attrNameLst>
+                                      </p:cBhvr>
+                                      <p:to>
+                                        <p:strVal val="visible"/>
+                                      </p:to>
+                                    </p:set>
+                                  </p:childTnLst>
+                                </p:cTn>
+                              </p:par>
+                            </p:childTnLst>
+                          </p:cTn>
+                        </p:par>
+                      </p:childTnLst>
+                    </p:cTn>
+                  </p:par>
+                </p:childTnLst>
+              </p:cTn>
+              <p:prevCondLst>
+                <p:cond evt="onPrev" delay="0">
+                  <p:tgtEl>
+                    <p:sldTgt/>
+                  </p:tgtEl>
+                </p:cond>
+              </p:prevCondLst>
+              <p:nextCondLst>
+                <p:cond evt="onNext" delay="0">
+                  <p:tgtEl>
+                    <p:sldTgt/>
+                  </p:tgtEl>
+                </p:cond>
+              </p:nextCondLst>
+            </p:seq>
+          </p:childTnLst>
+        </p:cTn>
+      </p:par>
+    </p:tnLst>
+    <p:bldLst>
+      <p:bldP spid="5" grpId="0" animBg="1"/>
+      <p:bldP spid="5" grpId="1" animBg="1"/>
+    </p:bldLst>
+  </p:timing>
 </p:sld>
 </file>
 
@@ -15688,19 +15985,12 @@
               <a:rPr lang="en-US" sz="2200" dirty="0">
                 <a:hlinkClick r:id="rId3"/>
               </a:rPr>
-              <a:t>https://trustmlvis.lnu.se</a:t>
-            </a:r>
-            <a:r>
-              <a:rPr lang="en-US" sz="2200">
-                <a:hlinkClick r:id="rId3"/>
-              </a:rPr>
-              <a:t>/</a:t>
-            </a:r>
-            <a:r>
-              <a:rPr lang="en-US" sz="2200"/>
+              <a:t>https://trustmlvis.lnu.se/</a:t>
+            </a:r>
+            <a:r>
+              <a:rPr lang="en-US" sz="2200" dirty="0"/>
               <a:t> </a:t>
             </a:r>
-            <a:endParaRPr lang="en-US" sz="2200" dirty="0"/>
           </a:p>
           <a:p>
             <a:r>
@@ -15712,7 +16002,7 @@
             <a:pPr lvl="1"/>
             <a:r>
               <a:rPr lang="en-US" sz="2000" dirty="0"/>
-              <a:t>What model technique(s) is it build for?</a:t>
+              <a:t>What model technique(s) is it built for?</a:t>
             </a:r>
           </a:p>
           <a:p>
@@ -15720,6 +16010,13 @@
             <a:r>
               <a:rPr lang="en-US" sz="2000" dirty="0"/>
               <a:t>What does it visualize and how?</a:t>
+            </a:r>
+          </a:p>
+          <a:p>
+            <a:pPr lvl="1"/>
+            <a:r>
+              <a:rPr lang="en-US" sz="2000" dirty="0"/>
+              <a:t>Would you make any changes to the design? Why or why not? </a:t>
             </a:r>
           </a:p>
         </p:txBody>
@@ -20491,6 +20788,55 @@
           </a:p>
         </p:txBody>
       </p:sp>
+      <p:sp>
+        <p:nvSpPr>
+          <p:cNvPr id="4" name="Rounded Rectangle 3">
+            <a:extLst>
+              <a:ext uri="{FF2B5EF4-FFF2-40B4-BE49-F238E27FC236}">
+                <a16:creationId xmlns:a16="http://schemas.microsoft.com/office/drawing/2014/main" id="{ACB2F432-4B65-D17D-4179-501F1EA58B10}"/>
+              </a:ext>
+            </a:extLst>
+          </p:cNvPr>
+          <p:cNvSpPr/>
+          <p:nvPr/>
+        </p:nvSpPr>
+        <p:spPr>
+          <a:xfrm>
+            <a:off x="5309165" y="3429000"/>
+            <a:ext cx="5903478" cy="1319134"/>
+          </a:xfrm>
+          <a:prstGeom prst="roundRect">
+            <a:avLst/>
+          </a:prstGeom>
+        </p:spPr>
+        <p:style>
+          <a:lnRef idx="2">
+            <a:schemeClr val="accent1">
+              <a:shade val="15000"/>
+            </a:schemeClr>
+          </a:lnRef>
+          <a:fillRef idx="1">
+            <a:schemeClr val="accent1"/>
+          </a:fillRef>
+          <a:effectRef idx="0">
+            <a:schemeClr val="accent1"/>
+          </a:effectRef>
+          <a:fontRef idx="minor">
+            <a:schemeClr val="lt1"/>
+          </a:fontRef>
+        </p:style>
+        <p:txBody>
+          <a:bodyPr rtlCol="0" anchor="ctr"/>
+          <a:lstStyle/>
+          <a:p>
+            <a:pPr algn="ctr"/>
+            <a:r>
+              <a:rPr lang="en-US" sz="2400" dirty="0"/>
+              <a:t>Where is modeling used for decision making?</a:t>
+            </a:r>
+          </a:p>
+        </p:txBody>
+      </p:sp>
     </p:spTree>
     <p:extLst>
       <p:ext uri="{BB962C8B-B14F-4D97-AF65-F5344CB8AC3E}">
@@ -20501,6 +20847,316 @@
   <p:clrMapOvr>
     <a:masterClrMapping/>
   </p:clrMapOvr>
+  <p:timing>
+    <p:tnLst>
+      <p:par>
+        <p:cTn id="1" dur="indefinite" restart="never" nodeType="tmRoot">
+          <p:childTnLst>
+            <p:seq concurrent="1" nextAc="seek">
+              <p:cTn id="2" dur="indefinite" nodeType="mainSeq">
+                <p:childTnLst>
+                  <p:par>
+                    <p:cTn id="3" fill="hold">
+                      <p:stCondLst>
+                        <p:cond delay="indefinite"/>
+                      </p:stCondLst>
+                      <p:childTnLst>
+                        <p:par>
+                          <p:cTn id="4" fill="hold">
+                            <p:stCondLst>
+                              <p:cond delay="0"/>
+                            </p:stCondLst>
+                            <p:childTnLst>
+                              <p:par>
+                                <p:cTn id="5" presetID="1" presetClass="entr" presetSubtype="0" fill="hold" grpId="1" nodeType="clickEffect">
+                                  <p:stCondLst>
+                                    <p:cond delay="0"/>
+                                  </p:stCondLst>
+                                  <p:childTnLst>
+                                    <p:set>
+                                      <p:cBhvr>
+                                        <p:cTn id="6" dur="1" fill="hold">
+                                          <p:stCondLst>
+                                            <p:cond delay="0"/>
+                                          </p:stCondLst>
+                                        </p:cTn>
+                                        <p:tgtEl>
+                                          <p:spTgt spid="4"/>
+                                        </p:tgtEl>
+                                        <p:attrNameLst>
+                                          <p:attrName>style.visibility</p:attrName>
+                                        </p:attrNameLst>
+                                      </p:cBhvr>
+                                      <p:to>
+                                        <p:strVal val="visible"/>
+                                      </p:to>
+                                    </p:set>
+                                  </p:childTnLst>
+                                </p:cTn>
+                              </p:par>
+                            </p:childTnLst>
+                          </p:cTn>
+                        </p:par>
+                      </p:childTnLst>
+                    </p:cTn>
+                  </p:par>
+                  <p:par>
+                    <p:cTn id="7" fill="hold">
+                      <p:stCondLst>
+                        <p:cond delay="indefinite"/>
+                      </p:stCondLst>
+                      <p:childTnLst>
+                        <p:par>
+                          <p:cTn id="8" fill="hold">
+                            <p:stCondLst>
+                              <p:cond delay="0"/>
+                            </p:stCondLst>
+                            <p:childTnLst>
+                              <p:par>
+                                <p:cTn id="9" presetID="1" presetClass="exit" presetSubtype="0" fill="hold" grpId="0" nodeType="clickEffect">
+                                  <p:stCondLst>
+                                    <p:cond delay="0"/>
+                                  </p:stCondLst>
+                                  <p:childTnLst>
+                                    <p:set>
+                                      <p:cBhvr>
+                                        <p:cTn id="10" dur="1" fill="hold">
+                                          <p:stCondLst>
+                                            <p:cond delay="0"/>
+                                          </p:stCondLst>
+                                        </p:cTn>
+                                        <p:tgtEl>
+                                          <p:spTgt spid="4"/>
+                                        </p:tgtEl>
+                                        <p:attrNameLst>
+                                          <p:attrName>style.visibility</p:attrName>
+                                        </p:attrNameLst>
+                                      </p:cBhvr>
+                                      <p:to>
+                                        <p:strVal val="hidden"/>
+                                      </p:to>
+                                    </p:set>
+                                  </p:childTnLst>
+                                </p:cTn>
+                              </p:par>
+                              <p:par>
+                                <p:cTn id="11" presetID="1" presetClass="entr" presetSubtype="0" fill="hold" nodeType="withEffect">
+                                  <p:stCondLst>
+                                    <p:cond delay="0"/>
+                                  </p:stCondLst>
+                                  <p:childTnLst>
+                                    <p:set>
+                                      <p:cBhvr>
+                                        <p:cTn id="12" dur="1" fill="hold">
+                                          <p:stCondLst>
+                                            <p:cond delay="0"/>
+                                          </p:stCondLst>
+                                        </p:cTn>
+                                        <p:tgtEl>
+                                          <p:spTgt spid="6">
+                                            <p:txEl>
+                                              <p:pRg st="1" end="1"/>
+                                            </p:txEl>
+                                          </p:spTgt>
+                                        </p:tgtEl>
+                                        <p:attrNameLst>
+                                          <p:attrName>style.visibility</p:attrName>
+                                        </p:attrNameLst>
+                                      </p:cBhvr>
+                                      <p:to>
+                                        <p:strVal val="visible"/>
+                                      </p:to>
+                                    </p:set>
+                                  </p:childTnLst>
+                                </p:cTn>
+                              </p:par>
+                              <p:par>
+                                <p:cTn id="13" presetID="1" presetClass="entr" presetSubtype="0" fill="hold" nodeType="withEffect">
+                                  <p:stCondLst>
+                                    <p:cond delay="0"/>
+                                  </p:stCondLst>
+                                  <p:childTnLst>
+                                    <p:set>
+                                      <p:cBhvr>
+                                        <p:cTn id="14" dur="1" fill="hold">
+                                          <p:stCondLst>
+                                            <p:cond delay="0"/>
+                                          </p:stCondLst>
+                                        </p:cTn>
+                                        <p:tgtEl>
+                                          <p:spTgt spid="6">
+                                            <p:txEl>
+                                              <p:pRg st="2" end="2"/>
+                                            </p:txEl>
+                                          </p:spTgt>
+                                        </p:tgtEl>
+                                        <p:attrNameLst>
+                                          <p:attrName>style.visibility</p:attrName>
+                                        </p:attrNameLst>
+                                      </p:cBhvr>
+                                      <p:to>
+                                        <p:strVal val="visible"/>
+                                      </p:to>
+                                    </p:set>
+                                  </p:childTnLst>
+                                </p:cTn>
+                              </p:par>
+                              <p:par>
+                                <p:cTn id="15" presetID="1" presetClass="entr" presetSubtype="0" fill="hold" nodeType="withEffect">
+                                  <p:stCondLst>
+                                    <p:cond delay="0"/>
+                                  </p:stCondLst>
+                                  <p:childTnLst>
+                                    <p:set>
+                                      <p:cBhvr>
+                                        <p:cTn id="16" dur="1" fill="hold">
+                                          <p:stCondLst>
+                                            <p:cond delay="0"/>
+                                          </p:stCondLst>
+                                        </p:cTn>
+                                        <p:tgtEl>
+                                          <p:spTgt spid="6">
+                                            <p:txEl>
+                                              <p:pRg st="3" end="3"/>
+                                            </p:txEl>
+                                          </p:spTgt>
+                                        </p:tgtEl>
+                                        <p:attrNameLst>
+                                          <p:attrName>style.visibility</p:attrName>
+                                        </p:attrNameLst>
+                                      </p:cBhvr>
+                                      <p:to>
+                                        <p:strVal val="visible"/>
+                                      </p:to>
+                                    </p:set>
+                                  </p:childTnLst>
+                                </p:cTn>
+                              </p:par>
+                              <p:par>
+                                <p:cTn id="17" presetID="1" presetClass="entr" presetSubtype="0" fill="hold" nodeType="withEffect">
+                                  <p:stCondLst>
+                                    <p:cond delay="0"/>
+                                  </p:stCondLst>
+                                  <p:childTnLst>
+                                    <p:set>
+                                      <p:cBhvr>
+                                        <p:cTn id="18" dur="1" fill="hold">
+                                          <p:stCondLst>
+                                            <p:cond delay="0"/>
+                                          </p:stCondLst>
+                                        </p:cTn>
+                                        <p:tgtEl>
+                                          <p:spTgt spid="6">
+                                            <p:txEl>
+                                              <p:pRg st="4" end="4"/>
+                                            </p:txEl>
+                                          </p:spTgt>
+                                        </p:tgtEl>
+                                        <p:attrNameLst>
+                                          <p:attrName>style.visibility</p:attrName>
+                                        </p:attrNameLst>
+                                      </p:cBhvr>
+                                      <p:to>
+                                        <p:strVal val="visible"/>
+                                      </p:to>
+                                    </p:set>
+                                  </p:childTnLst>
+                                </p:cTn>
+                              </p:par>
+                              <p:par>
+                                <p:cTn id="19" presetID="1" presetClass="entr" presetSubtype="0" fill="hold" nodeType="withEffect">
+                                  <p:stCondLst>
+                                    <p:cond delay="0"/>
+                                  </p:stCondLst>
+                                  <p:childTnLst>
+                                    <p:set>
+                                      <p:cBhvr>
+                                        <p:cTn id="20" dur="1" fill="hold">
+                                          <p:stCondLst>
+                                            <p:cond delay="0"/>
+                                          </p:stCondLst>
+                                        </p:cTn>
+                                        <p:tgtEl>
+                                          <p:spTgt spid="6">
+                                            <p:txEl>
+                                              <p:pRg st="5" end="5"/>
+                                            </p:txEl>
+                                          </p:spTgt>
+                                        </p:tgtEl>
+                                        <p:attrNameLst>
+                                          <p:attrName>style.visibility</p:attrName>
+                                        </p:attrNameLst>
+                                      </p:cBhvr>
+                                      <p:to>
+                                        <p:strVal val="visible"/>
+                                      </p:to>
+                                    </p:set>
+                                  </p:childTnLst>
+                                </p:cTn>
+                              </p:par>
+                              <p:par>
+                                <p:cTn id="21" presetID="1" presetClass="entr" presetSubtype="0" fill="hold" nodeType="withEffect">
+                                  <p:stCondLst>
+                                    <p:cond delay="0"/>
+                                  </p:stCondLst>
+                                  <p:childTnLst>
+                                    <p:set>
+                                      <p:cBhvr>
+                                        <p:cTn id="22" dur="1" fill="hold">
+                                          <p:stCondLst>
+                                            <p:cond delay="0"/>
+                                          </p:stCondLst>
+                                        </p:cTn>
+                                        <p:tgtEl>
+                                          <p:spTgt spid="6">
+                                            <p:txEl>
+                                              <p:pRg st="6" end="6"/>
+                                            </p:txEl>
+                                          </p:spTgt>
+                                        </p:tgtEl>
+                                        <p:attrNameLst>
+                                          <p:attrName>style.visibility</p:attrName>
+                                        </p:attrNameLst>
+                                      </p:cBhvr>
+                                      <p:to>
+                                        <p:strVal val="visible"/>
+                                      </p:to>
+                                    </p:set>
+                                  </p:childTnLst>
+                                </p:cTn>
+                              </p:par>
+                            </p:childTnLst>
+                          </p:cTn>
+                        </p:par>
+                      </p:childTnLst>
+                    </p:cTn>
+                  </p:par>
+                </p:childTnLst>
+              </p:cTn>
+              <p:prevCondLst>
+                <p:cond evt="onPrev" delay="0">
+                  <p:tgtEl>
+                    <p:sldTgt/>
+                  </p:tgtEl>
+                </p:cond>
+              </p:prevCondLst>
+              <p:nextCondLst>
+                <p:cond evt="onNext" delay="0">
+                  <p:tgtEl>
+                    <p:sldTgt/>
+                  </p:tgtEl>
+                </p:cond>
+              </p:nextCondLst>
+            </p:seq>
+          </p:childTnLst>
+        </p:cTn>
+      </p:par>
+    </p:tnLst>
+    <p:bldLst>
+      <p:bldP spid="4" grpId="0" animBg="1"/>
+      <p:bldP spid="4" grpId="1" animBg="1"/>
+    </p:bldLst>
+  </p:timing>
 </p:sld>
 </file>
 

--- a/slides/15-modeling.pptx
+++ b/slides/15-modeling.pptx
@@ -220,7 +220,7 @@
           <a:p>
             <a:fld id="{2CD22518-F7FE-2E40-9C60-793856882CE6}" type="datetimeFigureOut">
               <a:rPr lang="en-US" smtClean="0"/>
-              <a:t>3/24/26</a:t>
+              <a:t>3/30/26</a:t>
             </a:fld>
             <a:endParaRPr lang="en-US"/>
           </a:p>
@@ -2063,6 +2063,15 @@
           <a:p>
             <a:r>
               <a:rPr lang="en-US" dirty="0"/>
+              <a:t>DEMO ON DESKTOP</a:t>
+            </a:r>
+          </a:p>
+          <a:p>
+            <a:endParaRPr lang="en-US" dirty="0"/>
+          </a:p>
+          <a:p>
+            <a:r>
+              <a:rPr lang="en-US" dirty="0"/>
               <a:t>Selection of decision trees explaining marital status in the UCI Census Income 1994 dataset [21]. </a:t>
             </a:r>
           </a:p>
@@ -2818,6 +2827,23 @@
             </a:pPr>
             <a:r>
               <a:rPr lang="en-US" dirty="0"/>
+              <a:t>DEMO ON DESKTOP</a:t>
+            </a:r>
+          </a:p>
+          <a:p>
+            <a:pPr marL="171450" indent="-171450">
+              <a:buFont typeface="Arial" panose="020B0604020202020204" pitchFamily="34" charset="0"/>
+              <a:buChar char="•"/>
+            </a:pPr>
+            <a:endParaRPr lang="en-US" dirty="0"/>
+          </a:p>
+          <a:p>
+            <a:pPr marL="171450" indent="-171450">
+              <a:buFont typeface="Arial" panose="020B0604020202020204" pitchFamily="34" charset="0"/>
+              <a:buChar char="•"/>
+            </a:pPr>
+            <a:r>
+              <a:rPr lang="en-US" dirty="0"/>
               <a:t>(Visualization for Model Sensemaking and Selection) VMS comparing four machine learning models. </a:t>
             </a:r>
           </a:p>
@@ -4677,7 +4703,7 @@
             <a:fld id="{B61BEF0D-F0BB-DE4B-95CE-6DB70DBA9567}" type="datetimeFigureOut">
               <a:rPr lang="en-US" smtClean="0"/>
               <a:pPr/>
-              <a:t>3/24/26</a:t>
+              <a:t>3/30/26</a:t>
             </a:fld>
             <a:endParaRPr lang="en-US" dirty="0"/>
           </a:p>
@@ -4941,7 +4967,7 @@
             <a:fld id="{B61BEF0D-F0BB-DE4B-95CE-6DB70DBA9567}" type="datetimeFigureOut">
               <a:rPr lang="en-US" smtClean="0"/>
               <a:pPr/>
-              <a:t>3/24/26</a:t>
+              <a:t>3/30/26</a:t>
             </a:fld>
             <a:endParaRPr lang="en-US" dirty="0"/>
           </a:p>
@@ -5178,7 +5204,7 @@
             <a:fld id="{B61BEF0D-F0BB-DE4B-95CE-6DB70DBA9567}" type="datetimeFigureOut">
               <a:rPr lang="en-US" smtClean="0"/>
               <a:pPr/>
-              <a:t>3/24/26</a:t>
+              <a:t>3/30/26</a:t>
             </a:fld>
             <a:endParaRPr lang="en-US" dirty="0"/>
           </a:p>
@@ -5427,7 +5453,7 @@
             <a:fld id="{B61BEF0D-F0BB-DE4B-95CE-6DB70DBA9567}" type="datetimeFigureOut">
               <a:rPr lang="en-US" smtClean="0"/>
               <a:pPr/>
-              <a:t>3/24/26</a:t>
+              <a:t>3/30/26</a:t>
             </a:fld>
             <a:endParaRPr lang="en-US" dirty="0"/>
           </a:p>
@@ -5736,7 +5762,7 @@
             <a:fld id="{B61BEF0D-F0BB-DE4B-95CE-6DB70DBA9567}" type="datetimeFigureOut">
               <a:rPr lang="en-US" smtClean="0"/>
               <a:pPr/>
-              <a:t>3/24/26</a:t>
+              <a:t>3/30/26</a:t>
             </a:fld>
             <a:endParaRPr lang="en-US" dirty="0"/>
           </a:p>
@@ -6047,7 +6073,7 @@
             <a:fld id="{B61BEF0D-F0BB-DE4B-95CE-6DB70DBA9567}" type="datetimeFigureOut">
               <a:rPr lang="en-US" smtClean="0"/>
               <a:pPr/>
-              <a:t>3/24/26</a:t>
+              <a:t>3/30/26</a:t>
             </a:fld>
             <a:endParaRPr lang="en-US" dirty="0"/>
           </a:p>
@@ -6471,7 +6497,7 @@
             <a:fld id="{B61BEF0D-F0BB-DE4B-95CE-6DB70DBA9567}" type="datetimeFigureOut">
               <a:rPr lang="en-US" smtClean="0"/>
               <a:pPr/>
-              <a:t>3/24/26</a:t>
+              <a:t>3/30/26</a:t>
             </a:fld>
             <a:endParaRPr lang="en-US" dirty="0"/>
           </a:p>
@@ -6568,7 +6594,7 @@
             <a:fld id="{B61BEF0D-F0BB-DE4B-95CE-6DB70DBA9567}" type="datetimeFigureOut">
               <a:rPr lang="en-US" smtClean="0"/>
               <a:pPr/>
-              <a:t>3/24/26</a:t>
+              <a:t>3/30/26</a:t>
             </a:fld>
             <a:endParaRPr lang="en-US" dirty="0"/>
           </a:p>
@@ -6732,7 +6758,7 @@
             <a:fld id="{B61BEF0D-F0BB-DE4B-95CE-6DB70DBA9567}" type="datetimeFigureOut">
               <a:rPr lang="en-US" smtClean="0"/>
               <a:pPr/>
-              <a:t>3/24/26</a:t>
+              <a:t>3/30/26</a:t>
             </a:fld>
             <a:endParaRPr lang="en-US" dirty="0"/>
           </a:p>
@@ -7112,7 +7138,7 @@
             <a:fld id="{B61BEF0D-F0BB-DE4B-95CE-6DB70DBA9567}" type="datetimeFigureOut">
               <a:rPr lang="en-US" smtClean="0"/>
               <a:pPr/>
-              <a:t>3/24/26</a:t>
+              <a:t>3/30/26</a:t>
             </a:fld>
             <a:endParaRPr lang="en-US" dirty="0"/>
           </a:p>
@@ -7403,7 +7429,7 @@
             <a:fld id="{B61BEF0D-F0BB-DE4B-95CE-6DB70DBA9567}" type="datetimeFigureOut">
               <a:rPr lang="en-US" smtClean="0"/>
               <a:pPr/>
-              <a:t>3/24/26</a:t>
+              <a:t>3/30/26</a:t>
             </a:fld>
             <a:endParaRPr lang="en-US" dirty="0"/>
           </a:p>
@@ -7616,7 +7642,7 @@
             <a:fld id="{B61BEF0D-F0BB-DE4B-95CE-6DB70DBA9567}" type="datetimeFigureOut">
               <a:rPr lang="en-US" smtClean="0"/>
               <a:pPr/>
-              <a:t>3/24/26</a:t>
+              <a:t>3/30/26</a:t>
             </a:fld>
             <a:endParaRPr lang="en-US" dirty="0"/>
           </a:p>
@@ -14292,7 +14318,7 @@
           <a:p>
             <a:r>
               <a:rPr lang="en-US" sz="2000" dirty="0"/>
-              <a:t>Exploratory model analysis</a:t>
+              <a:t>Exploratory model analysis (EMA)</a:t>
             </a:r>
           </a:p>
           <a:p>
